--- a/docs/INFRA-REVIEW-2026-08-03.pptx
+++ b/docs/INFRA-REVIEW-2026-08-03.pptx
@@ -4981,7 +4981,7 @@
                 <a:ea typeface="Malgun Gothic" pitchFamily="34" charset="-122"/>
                 <a:cs typeface="Malgun Gothic" pitchFamily="34" charset="-120"/>
               </a:rPr>
-              <a:t>Oracle 자체 러너 (선택)</a:t>
+              <a:t>Oracle 자체 러너 — 보류</a:t>
             </a:r>
             <a:endParaRPr lang="en-US" sz="1600" dirty="0"/>
           </a:p>
@@ -5020,7 +5020,7 @@
                 <a:ea typeface="Malgun Gothic" pitchFamily="34" charset="-122"/>
                 <a:cs typeface="Malgun Gothic" pitchFamily="34" charset="-120"/>
               </a:rPr>
-              <a:t>학교를 크게 늘릴 때</a:t>
+              <a:t>지금은 쓰지 않기로 결정 (8/3)</a:t>
             </a:r>
             <a:endParaRPr lang="en-US" sz="1100" dirty="0"/>
           </a:p>
@@ -5093,7 +5093,7 @@
                 <a:ea typeface="Malgun Gothic" pitchFamily="34" charset="-122"/>
                 <a:cs typeface="Malgun Gothic" pitchFamily="34" charset="-120"/>
               </a:rPr>
-              <a:t>결정 대기 중</a:t>
+              <a:t>결정 사항</a:t>
             </a:r>
             <a:endParaRPr lang="en-US" sz="1800" dirty="0"/>
           </a:p>
@@ -5132,7 +5132,7 @@
                 <a:ea typeface="Malgun Gothic" pitchFamily="34" charset="-122"/>
                 <a:cs typeface="Malgun Gothic" pitchFamily="34" charset="-120"/>
               </a:rPr>
-              <a:t>·  Oracle 자체 러너를 지금 구축할지</a:t>
+              <a:t>·  Oracle 자체 러너 — 쓰지 않기로 확정</a:t>
             </a:r>
             <a:endParaRPr lang="en-US" sz="1200" dirty="0"/>
           </a:p>
@@ -5171,7 +5171,7 @@
                 <a:ea typeface="Malgun Gothic" pitchFamily="34" charset="-122"/>
                 <a:cs typeface="Malgun Gothic" pitchFamily="34" charset="-120"/>
               </a:rPr>
-              <a:t>·  다음 착수 작업 선택</a:t>
+              <a:t>·  서버·관리자 화면 — Cloudflare로 확정</a:t>
             </a:r>
             <a:endParaRPr lang="en-US" sz="1200" dirty="0"/>
           </a:p>
@@ -5210,7 +5210,7 @@
                 <a:ea typeface="Malgun Gothic" pitchFamily="34" charset="-122"/>
                 <a:cs typeface="Malgun Gothic" pitchFamily="34" charset="-120"/>
               </a:rPr>
-              <a:t>·  두 예산 충돌 처리 방식</a:t>
+              <a:t>·  남은 결정: 두 예산 충돌 처리</a:t>
             </a:r>
             <a:endParaRPr lang="en-US" sz="1200" dirty="0"/>
           </a:p>
@@ -5252,7 +5252,7 @@
                 <a:ea typeface="Malgun Gothic" pitchFamily="34" charset="-122"/>
                 <a:cs typeface="Malgun Gothic" pitchFamily="34" charset="-120"/>
               </a:rPr>
-              <a:t>결정 전까지</a:t>
+              <a:t>앱1 이전·비공개 전환은</a:t>
             </a:r>
             <a:endParaRPr lang="en-US" sz="1200" dirty="0"/>
           </a:p>
@@ -5272,7 +5272,7 @@
                 <a:ea typeface="Malgun Gothic" pitchFamily="34" charset="-122"/>
                 <a:cs typeface="Malgun Gothic" pitchFamily="34" charset="-120"/>
               </a:rPr>
-              <a:t>아무것도 실행하지 않습니다.</a:t>
+              <a:t>순서 때문에 아직 미착수.</a:t>
             </a:r>
             <a:endParaRPr lang="en-US" sz="1200" dirty="0"/>
           </a:p>
@@ -7391,7 +7391,7 @@
                 <a:ea typeface="Malgun Gothic" pitchFamily="34" charset="-122"/>
                 <a:cs typeface="Malgun Gothic" pitchFamily="34" charset="-120"/>
               </a:rPr>
-              <a:t>원인 — 13차 세션에서 학교를 13→29곳으로 늘렸는데</a:t>
+              <a:t>원인 — 학교를 13곳에서 크게 늘렸는데(현재 41곳)</a:t>
             </a:r>
             <a:endParaRPr lang="en-US" sz="1100" dirty="0"/>
           </a:p>
